--- a/textbook/ppt/chapter11_ppt.pptx
+++ b/textbook/ppt/chapter11_ppt.pptx
@@ -7,6 +7,12 @@
   <p:sldIdLst>
     <p:sldId id="256" r:id="rId7"/>
     <p:sldId id="257" r:id="rId8"/>
+    <p:sldId id="258" r:id="rId9"/>
+    <p:sldId id="259" r:id="rId10"/>
+    <p:sldId id="260" r:id="rId11"/>
+    <p:sldId id="261" r:id="rId12"/>
+    <p:sldId id="262" r:id="rId13"/>
+    <p:sldId id="263" r:id="rId14"/>
   </p:sldIdLst>
   <p:sldSz cx="12188952" cy="6858000" type="screen4x3"/>
   <p:notesSz cx="6858000" cy="9144000"/>
@@ -3229,6 +3235,634 @@
             <a:r>
               <a:rPr sz="1800"/>
               <a:t>• 区间合并的基本概念与应用</a:t>
+            </a:r>
+          </a:p>
+        </p:txBody>
+      </p:sp>
+    </p:spTree>
+  </p:cSld>
+  <p:clrMapOvr>
+    <a:masterClrMapping/>
+  </p:clrMapOvr>
+</p:sld>
+</file>
+
+<file path=ppt/slides/slide3.xml><?xml version="1.0" encoding="utf-8"?>
+<p:sld xmlns:a="http://schemas.openxmlformats.org/drawingml/2006/main" xmlns:p="http://schemas.openxmlformats.org/presentationml/2006/main" xmlns:r="http://schemas.openxmlformats.org/officeDocument/2006/relationships">
+  <p:cSld>
+    <p:spTree>
+      <p:nvGrpSpPr>
+        <p:cNvPr id="1" name=""/>
+        <p:cNvGrpSpPr/>
+        <p:nvPr/>
+      </p:nvGrpSpPr>
+      <p:grpSpPr/>
+      <p:sp>
+        <p:nvSpPr>
+          <p:cNvPr id="2" name="TextBox 1"/>
+          <p:cNvSpPr txBox="1"/>
+          <p:nvPr/>
+        </p:nvSpPr>
+        <p:spPr>
+          <a:xfrm>
+            <a:off x="914400" y="457200"/>
+            <a:ext cx="10058400" cy="914400"/>
+          </a:xfrm>
+          <a:prstGeom prst="rect">
+            <a:avLst/>
+          </a:prstGeom>
+          <a:noFill/>
+        </p:spPr>
+        <p:txBody>
+          <a:bodyPr wrap="none">
+            <a:spAutoFit/>
+          </a:bodyPr>
+          <a:lstStyle/>
+          <a:p>
+            <a:r>
+              <a:rPr sz="2800" b="1">
+                <a:solidFill>
+                  <a:srgbClr val="8B0000"/>
+                </a:solidFill>
+              </a:rPr>
+              <a:t>本章概览</a:t>
+            </a:r>
+          </a:p>
+        </p:txBody>
+      </p:sp>
+      <p:sp>
+        <p:nvSpPr>
+          <p:cNvPr id="3" name="TextBox 2"/>
+          <p:cNvSpPr txBox="1"/>
+          <p:nvPr/>
+        </p:nvSpPr>
+        <p:spPr>
+          <a:xfrm>
+            <a:off x="914400" y="1371600"/>
+            <a:ext cx="10058400" cy="5029200"/>
+          </a:xfrm>
+          <a:prstGeom prst="rect">
+            <a:avLst/>
+          </a:prstGeom>
+          <a:noFill/>
+        </p:spPr>
+        <p:txBody>
+          <a:bodyPr wrap="none">
+            <a:spAutoFit/>
+          </a:bodyPr>
+          <a:lstStyle/>
+          <a:p/>
+          <a:p>
+            <a:r>
+              <a:rPr sz="1600">
+                <a:solidFill>
+                  <a:srgbClr val="000000"/>
+                </a:solidFill>
+              </a:rPr>
+              <a:t>前缀和：s[i] = a[1]+...+a[i]，区间和 = s[r]-s[l-1]</a:t>
+            </a:r>
+          </a:p>
+          <a:p>
+            <a:r>
+              <a:rPr sz="1600">
+                <a:solidFill>
+                  <a:srgbClr val="000000"/>
+                </a:solidFill>
+              </a:rPr>
+              <a:t>差分：区间加操作 O(1)，最后前缀和还原</a:t>
+            </a:r>
+          </a:p>
+          <a:p>
+            <a:r>
+              <a:rPr sz="1600">
+                <a:solidFill>
+                  <a:srgbClr val="000000"/>
+                </a:solidFill>
+              </a:rPr>
+              <a:t>二维前缀和：容斥原理</a:t>
+            </a:r>
+          </a:p>
+          <a:p>
+            <a:r>
+              <a:rPr sz="1600">
+                <a:solidFill>
+                  <a:srgbClr val="000000"/>
+                </a:solidFill>
+              </a:rPr>
+              <a:t>区间合并：按左端点排序，逐个合并</a:t>
+            </a:r>
+          </a:p>
+        </p:txBody>
+      </p:sp>
+    </p:spTree>
+  </p:cSld>
+  <p:clrMapOvr>
+    <a:masterClrMapping/>
+  </p:clrMapOvr>
+</p:sld>
+</file>
+
+<file path=ppt/slides/slide4.xml><?xml version="1.0" encoding="utf-8"?>
+<p:sld xmlns:a="http://schemas.openxmlformats.org/drawingml/2006/main" xmlns:p="http://schemas.openxmlformats.org/presentationml/2006/main" xmlns:r="http://schemas.openxmlformats.org/officeDocument/2006/relationships">
+  <p:cSld>
+    <p:spTree>
+      <p:nvGrpSpPr>
+        <p:cNvPr id="1" name=""/>
+        <p:cNvGrpSpPr/>
+        <p:nvPr/>
+      </p:nvGrpSpPr>
+      <p:grpSpPr/>
+      <p:sp>
+        <p:nvSpPr>
+          <p:cNvPr id="2" name="TextBox 1"/>
+          <p:cNvSpPr txBox="1"/>
+          <p:nvPr/>
+        </p:nvSpPr>
+        <p:spPr>
+          <a:xfrm>
+            <a:off x="914400" y="457200"/>
+            <a:ext cx="10058400" cy="914400"/>
+          </a:xfrm>
+          <a:prstGeom prst="rect">
+            <a:avLst/>
+          </a:prstGeom>
+          <a:noFill/>
+        </p:spPr>
+        <p:txBody>
+          <a:bodyPr wrap="none">
+            <a:spAutoFit/>
+          </a:bodyPr>
+          <a:lstStyle/>
+          <a:p>
+            <a:r>
+              <a:rPr sz="2800" b="1">
+                <a:solidFill>
+                  <a:srgbClr val="8B0000"/>
+                </a:solidFill>
+              </a:rPr>
+              <a:t>C++ 代码示例</a:t>
+            </a:r>
+          </a:p>
+        </p:txBody>
+      </p:sp>
+      <p:sp>
+        <p:nvSpPr>
+          <p:cNvPr id="3" name="TextBox 2"/>
+          <p:cNvSpPr txBox="1"/>
+          <p:nvPr/>
+        </p:nvSpPr>
+        <p:spPr>
+          <a:xfrm>
+            <a:off x="914400" y="1371600"/>
+            <a:ext cx="10058400" cy="5029200"/>
+          </a:xfrm>
+          <a:prstGeom prst="rect">
+            <a:avLst/>
+          </a:prstGeom>
+          <a:noFill/>
+        </p:spPr>
+        <p:txBody>
+          <a:bodyPr wrap="none">
+            <a:spAutoFit/>
+          </a:bodyPr>
+          <a:lstStyle/>
+          <a:p/>
+          <a:p>
+            <a:r>
+              <a:rPr sz="1400">
+                <a:solidFill>
+                  <a:srgbClr val="000000"/>
+                </a:solidFill>
+              </a:rPr>
+              <a:t>int s[100001];
+for (int i = 1; i &lt;= n; i++)
+    s[i] = s[i-1] + a[i];
+// 区间 [l,r] 的和
+int sum = s[r] - s[l-1];</a:t>
+            </a:r>
+          </a:p>
+        </p:txBody>
+      </p:sp>
+    </p:spTree>
+  </p:cSld>
+  <p:clrMapOvr>
+    <a:masterClrMapping/>
+  </p:clrMapOvr>
+</p:sld>
+</file>
+
+<file path=ppt/slides/slide5.xml><?xml version="1.0" encoding="utf-8"?>
+<p:sld xmlns:a="http://schemas.openxmlformats.org/drawingml/2006/main" xmlns:p="http://schemas.openxmlformats.org/presentationml/2006/main" xmlns:r="http://schemas.openxmlformats.org/officeDocument/2006/relationships">
+  <p:cSld>
+    <p:spTree>
+      <p:nvGrpSpPr>
+        <p:cNvPr id="1" name=""/>
+        <p:cNvGrpSpPr/>
+        <p:nvPr/>
+      </p:nvGrpSpPr>
+      <p:grpSpPr/>
+      <p:sp>
+        <p:nvSpPr>
+          <p:cNvPr id="2" name="TextBox 1"/>
+          <p:cNvSpPr txBox="1"/>
+          <p:nvPr/>
+        </p:nvSpPr>
+        <p:spPr>
+          <a:xfrm>
+            <a:off x="914400" y="457200"/>
+            <a:ext cx="10058400" cy="914400"/>
+          </a:xfrm>
+          <a:prstGeom prst="rect">
+            <a:avLst/>
+          </a:prstGeom>
+          <a:noFill/>
+        </p:spPr>
+        <p:txBody>
+          <a:bodyPr wrap="none">
+            <a:spAutoFit/>
+          </a:bodyPr>
+          <a:lstStyle/>
+          <a:p>
+            <a:r>
+              <a:rPr sz="2800" b="1">
+                <a:solidFill>
+                  <a:srgbClr val="8B0000"/>
+                </a:solidFill>
+              </a:rPr>
+              <a:t>Python 代码示例</a:t>
+            </a:r>
+          </a:p>
+        </p:txBody>
+      </p:sp>
+      <p:sp>
+        <p:nvSpPr>
+          <p:cNvPr id="3" name="TextBox 2"/>
+          <p:cNvSpPr txBox="1"/>
+          <p:nvPr/>
+        </p:nvSpPr>
+        <p:spPr>
+          <a:xfrm>
+            <a:off x="914400" y="1371600"/>
+            <a:ext cx="10058400" cy="5029200"/>
+          </a:xfrm>
+          <a:prstGeom prst="rect">
+            <a:avLst/>
+          </a:prstGeom>
+          <a:noFill/>
+        </p:spPr>
+        <p:txBody>
+          <a:bodyPr wrap="none">
+            <a:spAutoFit/>
+          </a:bodyPr>
+          <a:lstStyle/>
+          <a:p/>
+          <a:p>
+            <a:r>
+              <a:rPr sz="1400">
+                <a:solidFill>
+                  <a:srgbClr val="000000"/>
+                </a:solidFill>
+              </a:rPr>
+              <a:t>s = [0] * (n+1)
+for i in range(1, n+1):
+    s[i] = s[i-1] + a[i]
+# 区间 [l,r] 的和
+sum_val = s[r] - s[l-1]</a:t>
+            </a:r>
+          </a:p>
+        </p:txBody>
+      </p:sp>
+    </p:spTree>
+  </p:cSld>
+  <p:clrMapOvr>
+    <a:masterClrMapping/>
+  </p:clrMapOvr>
+</p:sld>
+</file>
+
+<file path=ppt/slides/slide6.xml><?xml version="1.0" encoding="utf-8"?>
+<p:sld xmlns:a="http://schemas.openxmlformats.org/drawingml/2006/main" xmlns:p="http://schemas.openxmlformats.org/presentationml/2006/main" xmlns:r="http://schemas.openxmlformats.org/officeDocument/2006/relationships">
+  <p:cSld>
+    <p:spTree>
+      <p:nvGrpSpPr>
+        <p:cNvPr id="1" name=""/>
+        <p:cNvGrpSpPr/>
+        <p:nvPr/>
+      </p:nvGrpSpPr>
+      <p:grpSpPr/>
+      <p:sp>
+        <p:nvSpPr>
+          <p:cNvPr id="2" name="TextBox 1"/>
+          <p:cNvSpPr txBox="1"/>
+          <p:nvPr/>
+        </p:nvSpPr>
+        <p:spPr>
+          <a:xfrm>
+            <a:off x="914400" y="457200"/>
+            <a:ext cx="10058400" cy="914400"/>
+          </a:xfrm>
+          <a:prstGeom prst="rect">
+            <a:avLst/>
+          </a:prstGeom>
+          <a:noFill/>
+        </p:spPr>
+        <p:txBody>
+          <a:bodyPr wrap="none">
+            <a:spAutoFit/>
+          </a:bodyPr>
+          <a:lstStyle/>
+          <a:p>
+            <a:r>
+              <a:rPr sz="2800" b="1">
+                <a:solidFill>
+                  <a:srgbClr val="8B0000"/>
+                </a:solidFill>
+              </a:rPr>
+              <a:t>常见错误</a:t>
+            </a:r>
+          </a:p>
+        </p:txBody>
+      </p:sp>
+      <p:sp>
+        <p:nvSpPr>
+          <p:cNvPr id="3" name="TextBox 2"/>
+          <p:cNvSpPr txBox="1"/>
+          <p:nvPr/>
+        </p:nvSpPr>
+        <p:spPr>
+          <a:xfrm>
+            <a:off x="914400" y="1371600"/>
+            <a:ext cx="10058400" cy="5029200"/>
+          </a:xfrm>
+          <a:prstGeom prst="rect">
+            <a:avLst/>
+          </a:prstGeom>
+          <a:noFill/>
+        </p:spPr>
+        <p:txBody>
+          <a:bodyPr wrap="none">
+            <a:spAutoFit/>
+          </a:bodyPr>
+          <a:lstStyle/>
+          <a:p/>
+          <a:p>
+            <a:r>
+              <a:rPr sz="1600">
+                <a:solidFill>
+                  <a:srgbClr val="000000"/>
+                </a:solidFill>
+              </a:rPr>
+              <a:t>前缀和下标从1开始</a:t>
+            </a:r>
+          </a:p>
+          <a:p>
+            <a:r>
+              <a:rPr sz="1600">
+                <a:solidFill>
+                  <a:srgbClr val="000000"/>
+                </a:solidFill>
+              </a:rPr>
+              <a:t>差分还原后要再求一次前缀和</a:t>
+            </a:r>
+          </a:p>
+          <a:p>
+            <a:r>
+              <a:rPr sz="1600">
+                <a:solidFill>
+                  <a:srgbClr val="000000"/>
+                </a:solidFill>
+              </a:rPr>
+              <a:t>二维前缀和的容斥公式记错</a:t>
+            </a:r>
+          </a:p>
+          <a:p>
+            <a:r>
+              <a:rPr sz="1600">
+                <a:solidFill>
+                  <a:srgbClr val="000000"/>
+                </a:solidFill>
+              </a:rPr>
+              <a:t>区间合并忘记排序</a:t>
+            </a:r>
+          </a:p>
+        </p:txBody>
+      </p:sp>
+    </p:spTree>
+  </p:cSld>
+  <p:clrMapOvr>
+    <a:masterClrMapping/>
+  </p:clrMapOvr>
+</p:sld>
+</file>
+
+<file path=ppt/slides/slide7.xml><?xml version="1.0" encoding="utf-8"?>
+<p:sld xmlns:a="http://schemas.openxmlformats.org/drawingml/2006/main" xmlns:p="http://schemas.openxmlformats.org/presentationml/2006/main" xmlns:r="http://schemas.openxmlformats.org/officeDocument/2006/relationships">
+  <p:cSld>
+    <p:spTree>
+      <p:nvGrpSpPr>
+        <p:cNvPr id="1" name=""/>
+        <p:cNvGrpSpPr/>
+        <p:nvPr/>
+      </p:nvGrpSpPr>
+      <p:grpSpPr/>
+      <p:sp>
+        <p:nvSpPr>
+          <p:cNvPr id="2" name="TextBox 1"/>
+          <p:cNvSpPr txBox="1"/>
+          <p:nvPr/>
+        </p:nvSpPr>
+        <p:spPr>
+          <a:xfrm>
+            <a:off x="914400" y="457200"/>
+            <a:ext cx="10058400" cy="914400"/>
+          </a:xfrm>
+          <a:prstGeom prst="rect">
+            <a:avLst/>
+          </a:prstGeom>
+          <a:noFill/>
+        </p:spPr>
+        <p:txBody>
+          <a:bodyPr wrap="none">
+            <a:spAutoFit/>
+          </a:bodyPr>
+          <a:lstStyle/>
+          <a:p>
+            <a:r>
+              <a:rPr sz="2800" b="1">
+                <a:solidFill>
+                  <a:srgbClr val="8B0000"/>
+                </a:solidFill>
+              </a:rPr>
+              <a:t>练习题目</a:t>
+            </a:r>
+          </a:p>
+        </p:txBody>
+      </p:sp>
+      <p:sp>
+        <p:nvSpPr>
+          <p:cNvPr id="3" name="TextBox 2"/>
+          <p:cNvSpPr txBox="1"/>
+          <p:nvPr/>
+        </p:nvSpPr>
+        <p:spPr>
+          <a:xfrm>
+            <a:off x="914400" y="1371600"/>
+            <a:ext cx="10058400" cy="5029200"/>
+          </a:xfrm>
+          <a:prstGeom prst="rect">
+            <a:avLst/>
+          </a:prstGeom>
+          <a:noFill/>
+        </p:spPr>
+        <p:txBody>
+          <a:bodyPr wrap="none">
+            <a:spAutoFit/>
+          </a:bodyPr>
+          <a:lstStyle/>
+          <a:p/>
+          <a:p>
+            <a:r>
+              <a:rPr sz="1600">
+                <a:solidFill>
+                  <a:srgbClr val="000000"/>
+                </a:solidFill>
+              </a:rPr>
+              <a:t>JD121 离散聚力</a:t>
+            </a:r>
+          </a:p>
+          <a:p>
+            <a:r>
+              <a:rPr sz="1600">
+                <a:solidFill>
+                  <a:srgbClr val="000000"/>
+                </a:solidFill>
+              </a:rPr>
+              <a:t>JD123 蓄势之术</a:t>
+            </a:r>
+          </a:p>
+          <a:p>
+            <a:r>
+              <a:rPr sz="1600">
+                <a:solidFill>
+                  <a:srgbClr val="000000"/>
+                </a:solidFill>
+              </a:rPr>
+              <a:t>JD125 差分之术</a:t>
+            </a:r>
+          </a:p>
+        </p:txBody>
+      </p:sp>
+    </p:spTree>
+  </p:cSld>
+  <p:clrMapOvr>
+    <a:masterClrMapping/>
+  </p:clrMapOvr>
+</p:sld>
+</file>
+
+<file path=ppt/slides/slide8.xml><?xml version="1.0" encoding="utf-8"?>
+<p:sld xmlns:a="http://schemas.openxmlformats.org/drawingml/2006/main" xmlns:p="http://schemas.openxmlformats.org/presentationml/2006/main" xmlns:r="http://schemas.openxmlformats.org/officeDocument/2006/relationships">
+  <p:cSld>
+    <p:spTree>
+      <p:nvGrpSpPr>
+        <p:cNvPr id="1" name=""/>
+        <p:cNvGrpSpPr/>
+        <p:nvPr/>
+      </p:nvGrpSpPr>
+      <p:grpSpPr/>
+      <p:sp>
+        <p:nvSpPr>
+          <p:cNvPr id="2" name="TextBox 1"/>
+          <p:cNvSpPr txBox="1"/>
+          <p:nvPr/>
+        </p:nvSpPr>
+        <p:spPr>
+          <a:xfrm>
+            <a:off x="914400" y="457200"/>
+            <a:ext cx="10058400" cy="914400"/>
+          </a:xfrm>
+          <a:prstGeom prst="rect">
+            <a:avLst/>
+          </a:prstGeom>
+          <a:noFill/>
+        </p:spPr>
+        <p:txBody>
+          <a:bodyPr wrap="none">
+            <a:spAutoFit/>
+          </a:bodyPr>
+          <a:lstStyle/>
+          <a:p>
+            <a:r>
+              <a:rPr sz="2800" b="1">
+                <a:solidFill>
+                  <a:srgbClr val="8B0000"/>
+                </a:solidFill>
+              </a:rPr>
+              <a:t>本章小结</a:t>
+            </a:r>
+          </a:p>
+        </p:txBody>
+      </p:sp>
+      <p:sp>
+        <p:nvSpPr>
+          <p:cNvPr id="3" name="TextBox 2"/>
+          <p:cNvSpPr txBox="1"/>
+          <p:nvPr/>
+        </p:nvSpPr>
+        <p:spPr>
+          <a:xfrm>
+            <a:off x="914400" y="1371600"/>
+            <a:ext cx="10058400" cy="5029200"/>
+          </a:xfrm>
+          <a:prstGeom prst="rect">
+            <a:avLst/>
+          </a:prstGeom>
+          <a:noFill/>
+        </p:spPr>
+        <p:txBody>
+          <a:bodyPr wrap="none">
+            <a:spAutoFit/>
+          </a:bodyPr>
+          <a:lstStyle/>
+          <a:p/>
+          <a:p>
+            <a:r>
+              <a:rPr sz="1600">
+                <a:solidFill>
+                  <a:srgbClr val="000000"/>
+                </a:solidFill>
+              </a:rPr>
+              <a:t>掌握核心概念</a:t>
+            </a:r>
+          </a:p>
+          <a:p>
+            <a:r>
+              <a:rPr sz="1600">
+                <a:solidFill>
+                  <a:srgbClr val="000000"/>
+                </a:solidFill>
+              </a:rPr>
+              <a:t>多做练习</a:t>
+            </a:r>
+          </a:p>
+          <a:p>
+            <a:r>
+              <a:rPr sz="1600">
+                <a:solidFill>
+                  <a:srgbClr val="000000"/>
+                </a:solidFill>
+              </a:rPr>
+              <a:t>注意边界条件</a:t>
+            </a:r>
+          </a:p>
+          <a:p>
+            <a:r>
+              <a:rPr sz="1600">
+                <a:solidFill>
+                  <a:srgbClr val="000000"/>
+                </a:solidFill>
+              </a:rPr>
+              <a:t>理解算法思想而非死记代码</a:t>
             </a:r>
           </a:p>
         </p:txBody>

--- a/textbook/ppt/chapter11_ppt.pptx
+++ b/textbook/ppt/chapter11_ppt.pptx
@@ -12,7 +12,6 @@
     <p:sldId id="260" r:id="rId11"/>
     <p:sldId id="261" r:id="rId12"/>
     <p:sldId id="262" r:id="rId13"/>
-    <p:sldId id="263" r:id="rId14"/>
   </p:sldIdLst>
   <p:sldSz cx="12188952" cy="6858000" type="screen4x3"/>
   <p:notesSz cx="6858000" cy="9144000"/>
@@ -3124,18 +3123,7 @@
                   <a:srgbClr val="8B0000"/>
                 </a:solidFill>
               </a:rPr>
-              <a:t>第11章 蓄势待发</a:t>
-            </a:r>
-          </a:p>
-          <a:p>
-            <a:pPr algn="ctr"/>
-            <a:r>
-              <a:rPr sz="2400">
-                <a:solidFill>
-                  <a:srgbClr val="6B5D4D"/>
-                </a:solidFill>
-              </a:rPr>
-              <a:t>前缀和、差分与双指针</a:t>
+              <a:t>第11章</a:t>
             </a:r>
           </a:p>
         </p:txBody>
@@ -3166,8 +3154,8 @@
         </p:nvSpPr>
         <p:spPr>
           <a:xfrm>
-            <a:off x="914400" y="457200"/>
-            <a:ext cx="10058400" cy="914400"/>
+            <a:off x="457200" y="274320"/>
+            <a:ext cx="10972800" cy="731520"/>
           </a:xfrm>
           <a:prstGeom prst="rect">
             <a:avLst/>
@@ -3181,7 +3169,7 @@
           <a:lstStyle/>
           <a:p>
             <a:r>
-              <a:rPr sz="2800" b="1">
+              <a:rPr sz="2400" b="1">
                 <a:solidFill>
                   <a:srgbClr val="8B0000"/>
                 </a:solidFill>
@@ -3199,8 +3187,8 @@
         </p:nvSpPr>
         <p:spPr>
           <a:xfrm>
-            <a:off x="914400" y="1371600"/>
-            <a:ext cx="10058400" cy="4572000"/>
+            <a:off x="457200" y="1097280"/>
+            <a:ext cx="10972800" cy="5029200"/>
           </a:xfrm>
           <a:prstGeom prst="rect">
             <a:avLst/>
@@ -3215,26 +3203,42 @@
           <a:p/>
           <a:p>
             <a:r>
-              <a:rPr sz="1800"/>
-              <a:t>• 一维前缀和的基本概念与应用</a:t>
-            </a:r>
-          </a:p>
-          <a:p>
-            <a:r>
-              <a:rPr sz="1800"/>
-              <a:t>• 二维前缀和的基本概念与应用</a:t>
-            </a:r>
-          </a:p>
-          <a:p>
-            <a:r>
-              <a:rPr sz="1800"/>
-              <a:t>• 差分数组的基本概念与应用</a:t>
-            </a:r>
-          </a:p>
-          <a:p>
-            <a:r>
-              <a:rPr sz="1800"/>
-              <a:t>• 区间合并的基本概念与应用</a:t>
+              <a:rPr sz="1400">
+                <a:solidFill>
+                  <a:srgbClr val="000000"/>
+                </a:solidFill>
+              </a:rPr>
+              <a:t>前缀和：s[i]=a[1]+...+a[i]，区间和=s[r]-s[l-1]</a:t>
+            </a:r>
+          </a:p>
+          <a:p>
+            <a:r>
+              <a:rPr sz="1400">
+                <a:solidFill>
+                  <a:srgbClr val="000000"/>
+                </a:solidFill>
+              </a:rPr>
+              <a:t>差分：区间加 O(1)，最后前缀和还原</a:t>
+            </a:r>
+          </a:p>
+          <a:p>
+            <a:r>
+              <a:rPr sz="1400">
+                <a:solidFill>
+                  <a:srgbClr val="000000"/>
+                </a:solidFill>
+              </a:rPr>
+              <a:t>二维前缀和：容斥原理</a:t>
+            </a:r>
+          </a:p>
+          <a:p>
+            <a:r>
+              <a:rPr sz="1400">
+                <a:solidFill>
+                  <a:srgbClr val="000000"/>
+                </a:solidFill>
+              </a:rPr>
+              <a:t>区间合并：按左端点排序，逐个合并</a:t>
             </a:r>
           </a:p>
         </p:txBody>
@@ -3265,8 +3269,8 @@
         </p:nvSpPr>
         <p:spPr>
           <a:xfrm>
-            <a:off x="914400" y="457200"/>
-            <a:ext cx="10058400" cy="914400"/>
+            <a:off x="457200" y="274320"/>
+            <a:ext cx="10972800" cy="731520"/>
           </a:xfrm>
           <a:prstGeom prst="rect">
             <a:avLst/>
@@ -3280,12 +3284,12 @@
           <a:lstStyle/>
           <a:p>
             <a:r>
-              <a:rPr sz="2800" b="1">
+              <a:rPr sz="2400" b="1">
                 <a:solidFill>
                   <a:srgbClr val="8B0000"/>
                 </a:solidFill>
               </a:rPr>
-              <a:t>本章概览</a:t>
+              <a:t>C++ 代码示例</a:t>
             </a:r>
           </a:p>
         </p:txBody>
@@ -3298,8 +3302,8 @@
         </p:nvSpPr>
         <p:spPr>
           <a:xfrm>
-            <a:off x="914400" y="1371600"/>
-            <a:ext cx="10058400" cy="5029200"/>
+            <a:off x="457200" y="1097280"/>
+            <a:ext cx="10972800" cy="5029200"/>
           </a:xfrm>
           <a:prstGeom prst="rect">
             <a:avLst/>
@@ -3314,42 +3318,22 @@
           <a:p/>
           <a:p>
             <a:r>
-              <a:rPr sz="1600">
+              <a:rPr sz="1200">
                 <a:solidFill>
                   <a:srgbClr val="000000"/>
                 </a:solidFill>
               </a:rPr>
-              <a:t>前缀和：s[i] = a[1]+...+a[i]，区间和 = s[r]-s[l-1]</a:t>
-            </a:r>
-          </a:p>
-          <a:p>
-            <a:r>
-              <a:rPr sz="1600">
-                <a:solidFill>
-                  <a:srgbClr val="000000"/>
-                </a:solidFill>
-              </a:rPr>
-              <a:t>差分：区间加操作 O(1)，最后前缀和还原</a:t>
-            </a:r>
-          </a:p>
-          <a:p>
-            <a:r>
-              <a:rPr sz="1600">
-                <a:solidFill>
-                  <a:srgbClr val="000000"/>
-                </a:solidFill>
-              </a:rPr>
-              <a:t>二维前缀和：容斥原理</a:t>
-            </a:r>
-          </a:p>
-          <a:p>
-            <a:r>
-              <a:rPr sz="1600">
-                <a:solidFill>
-                  <a:srgbClr val="000000"/>
-                </a:solidFill>
-              </a:rPr>
-              <a:t>区间合并：按左端点排序，逐个合并</a:t>
+              <a:t>// 前缀和
+int s[100001];
+for (int i = 1; i &lt;= n; i++)
+    s[i] = s[i-1] + a[i];
+// 区间 [l,r] 的和
+int sum = s[r] - s[l-1];
+// 差分
+int b[100001];
+b[l] += c;
+b[r+1] -= c;
+// 最后前缀和还原</a:t>
             </a:r>
           </a:p>
         </p:txBody>
@@ -3380,8 +3364,8 @@
         </p:nvSpPr>
         <p:spPr>
           <a:xfrm>
-            <a:off x="914400" y="457200"/>
-            <a:ext cx="10058400" cy="914400"/>
+            <a:off x="457200" y="274320"/>
+            <a:ext cx="10972800" cy="731520"/>
           </a:xfrm>
           <a:prstGeom prst="rect">
             <a:avLst/>
@@ -3395,12 +3379,12 @@
           <a:lstStyle/>
           <a:p>
             <a:r>
-              <a:rPr sz="2800" b="1">
+              <a:rPr sz="2400" b="1">
                 <a:solidFill>
                   <a:srgbClr val="8B0000"/>
                 </a:solidFill>
               </a:rPr>
-              <a:t>C++ 代码示例</a:t>
+              <a:t>Python 代码示例</a:t>
             </a:r>
           </a:p>
         </p:txBody>
@@ -3413,8 +3397,8 @@
         </p:nvSpPr>
         <p:spPr>
           <a:xfrm>
-            <a:off x="914400" y="1371600"/>
-            <a:ext cx="10058400" cy="5029200"/>
+            <a:off x="457200" y="1097280"/>
+            <a:ext cx="10972800" cy="5029200"/>
           </a:xfrm>
           <a:prstGeom prst="rect">
             <a:avLst/>
@@ -3429,16 +3413,21 @@
           <a:p/>
           <a:p>
             <a:r>
-              <a:rPr sz="1400">
+              <a:rPr sz="1200">
                 <a:solidFill>
                   <a:srgbClr val="000000"/>
                 </a:solidFill>
               </a:rPr>
-              <a:t>int s[100001];
-for (int i = 1; i &lt;= n; i++)
-    s[i] = s[i-1] + a[i];
-// 区间 [l,r] 的和
-int sum = s[r] - s[l-1];</a:t>
+              <a:t># 前缀和
+s = [0] * (n+1)
+for i in range(1, n+1):
+    s[i] = s[i-1] + a[i]
+# 区间 [l,r] 的和
+total = s[r] - s[l-1]
+# 差分
+b = [0] * (n+2)
+b[l] += c
+b[r+1] -= c</a:t>
             </a:r>
           </a:p>
         </p:txBody>
@@ -3469,8 +3458,8 @@
         </p:nvSpPr>
         <p:spPr>
           <a:xfrm>
-            <a:off x="914400" y="457200"/>
-            <a:ext cx="10058400" cy="914400"/>
+            <a:off x="457200" y="274320"/>
+            <a:ext cx="10972800" cy="731520"/>
           </a:xfrm>
           <a:prstGeom prst="rect">
             <a:avLst/>
@@ -3484,12 +3473,12 @@
           <a:lstStyle/>
           <a:p>
             <a:r>
-              <a:rPr sz="2800" b="1">
+              <a:rPr sz="2400" b="1">
                 <a:solidFill>
                   <a:srgbClr val="8B0000"/>
                 </a:solidFill>
               </a:rPr>
-              <a:t>Python 代码示例</a:t>
+              <a:t>常见错误</a:t>
             </a:r>
           </a:p>
         </p:txBody>
@@ -3502,8 +3491,8 @@
         </p:nvSpPr>
         <p:spPr>
           <a:xfrm>
-            <a:off x="914400" y="1371600"/>
-            <a:ext cx="10058400" cy="5029200"/>
+            <a:off x="457200" y="1097280"/>
+            <a:ext cx="10972800" cy="5029200"/>
           </a:xfrm>
           <a:prstGeom prst="rect">
             <a:avLst/>
@@ -3523,11 +3512,37 @@
                   <a:srgbClr val="000000"/>
                 </a:solidFill>
               </a:rPr>
-              <a:t>s = [0] * (n+1)
-for i in range(1, n+1):
-    s[i] = s[i-1] + a[i]
-# 区间 [l,r] 的和
-sum_val = s[r] - s[l-1]</a:t>
+              <a:t>前缀和下标从1开始（不是0）</a:t>
+            </a:r>
+          </a:p>
+          <a:p>
+            <a:r>
+              <a:rPr sz="1400">
+                <a:solidFill>
+                  <a:srgbClr val="000000"/>
+                </a:solidFill>
+              </a:rPr>
+              <a:t>差分还原后要再求一次前缀和</a:t>
+            </a:r>
+          </a:p>
+          <a:p>
+            <a:r>
+              <a:rPr sz="1400">
+                <a:solidFill>
+                  <a:srgbClr val="000000"/>
+                </a:solidFill>
+              </a:rPr>
+              <a:t>二维前缀和的容斥公式：s[x2][y2]-s[x1-1][y2]-s[x2][y1-1]+s[x1-1][y1-1]</a:t>
+            </a:r>
+          </a:p>
+          <a:p>
+            <a:r>
+              <a:rPr sz="1400">
+                <a:solidFill>
+                  <a:srgbClr val="000000"/>
+                </a:solidFill>
+              </a:rPr>
+              <a:t>区间合并：先排序再合并</a:t>
             </a:r>
           </a:p>
         </p:txBody>
@@ -3558,8 +3573,8 @@
         </p:nvSpPr>
         <p:spPr>
           <a:xfrm>
-            <a:off x="914400" y="457200"/>
-            <a:ext cx="10058400" cy="914400"/>
+            <a:off x="457200" y="274320"/>
+            <a:ext cx="10972800" cy="731520"/>
           </a:xfrm>
           <a:prstGeom prst="rect">
             <a:avLst/>
@@ -3573,12 +3588,12 @@
           <a:lstStyle/>
           <a:p>
             <a:r>
-              <a:rPr sz="2800" b="1">
+              <a:rPr sz="2400" b="1">
                 <a:solidFill>
                   <a:srgbClr val="8B0000"/>
                 </a:solidFill>
               </a:rPr>
-              <a:t>常见错误</a:t>
+              <a:t>练习题目</a:t>
             </a:r>
           </a:p>
         </p:txBody>
@@ -3591,8 +3606,8 @@
         </p:nvSpPr>
         <p:spPr>
           <a:xfrm>
-            <a:off x="914400" y="1371600"/>
-            <a:ext cx="10058400" cy="5029200"/>
+            <a:off x="457200" y="1097280"/>
+            <a:ext cx="10972800" cy="5029200"/>
           </a:xfrm>
           <a:prstGeom prst="rect">
             <a:avLst/>
@@ -3607,42 +3622,32 @@
           <a:p/>
           <a:p>
             <a:r>
-              <a:rPr sz="1600">
+              <a:rPr sz="1400">
                 <a:solidFill>
                   <a:srgbClr val="000000"/>
                 </a:solidFill>
               </a:rPr>
-              <a:t>前缀和下标从1开始</a:t>
-            </a:r>
-          </a:p>
-          <a:p>
-            <a:r>
-              <a:rPr sz="1600">
+              <a:t>JD121 离散聚力 - 离散化+前缀和 (Hard)</a:t>
+            </a:r>
+          </a:p>
+          <a:p>
+            <a:r>
+              <a:rPr sz="1400">
                 <a:solidFill>
                   <a:srgbClr val="000000"/>
                 </a:solidFill>
               </a:rPr>
-              <a:t>差分还原后要再求一次前缀和</a:t>
-            </a:r>
-          </a:p>
-          <a:p>
-            <a:r>
-              <a:rPr sz="1600">
+              <a:t>JD123 蓄势之术 - 一维前缀和 (Medium)</a:t>
+            </a:r>
+          </a:p>
+          <a:p>
+            <a:r>
+              <a:rPr sz="1400">
                 <a:solidFill>
                   <a:srgbClr val="000000"/>
                 </a:solidFill>
               </a:rPr>
-              <a:t>二维前缀和的容斥公式记错</a:t>
-            </a:r>
-          </a:p>
-          <a:p>
-            <a:r>
-              <a:rPr sz="1600">
-                <a:solidFill>
-                  <a:srgbClr val="000000"/>
-                </a:solidFill>
-              </a:rPr>
-              <a:t>区间合并忘记排序</a:t>
+              <a:t>JD125 差分之术 - 一维差分 (Medium)</a:t>
             </a:r>
           </a:p>
         </p:txBody>
@@ -3673,8 +3678,8 @@
         </p:nvSpPr>
         <p:spPr>
           <a:xfrm>
-            <a:off x="914400" y="457200"/>
-            <a:ext cx="10058400" cy="914400"/>
+            <a:off x="457200" y="274320"/>
+            <a:ext cx="10972800" cy="731520"/>
           </a:xfrm>
           <a:prstGeom prst="rect">
             <a:avLst/>
@@ -3688,12 +3693,12 @@
           <a:lstStyle/>
           <a:p>
             <a:r>
-              <a:rPr sz="2800" b="1">
+              <a:rPr sz="2400" b="1">
                 <a:solidFill>
                   <a:srgbClr val="8B0000"/>
                 </a:solidFill>
               </a:rPr>
-              <a:t>练习题目</a:t>
+              <a:t>本章小结</a:t>
             </a:r>
           </a:p>
         </p:txBody>
@@ -3706,8 +3711,8 @@
         </p:nvSpPr>
         <p:spPr>
           <a:xfrm>
-            <a:off x="914400" y="1371600"/>
-            <a:ext cx="10058400" cy="5029200"/>
+            <a:off x="457200" y="1097280"/>
+            <a:ext cx="10972800" cy="5029200"/>
           </a:xfrm>
           <a:prstGeom prst="rect">
             <a:avLst/>
@@ -3722,147 +3727,42 @@
           <a:p/>
           <a:p>
             <a:r>
-              <a:rPr sz="1600">
+              <a:rPr sz="1400">
                 <a:solidFill>
                   <a:srgbClr val="000000"/>
                 </a:solidFill>
               </a:rPr>
-              <a:t>JD121 离散聚力</a:t>
-            </a:r>
-          </a:p>
-          <a:p>
-            <a:r>
-              <a:rPr sz="1600">
+              <a:t>本章学习了第11章的核心概念</a:t>
+            </a:r>
+          </a:p>
+          <a:p>
+            <a:r>
+              <a:rPr sz="1400">
                 <a:solidFill>
                   <a:srgbClr val="000000"/>
                 </a:solidFill>
               </a:rPr>
-              <a:t>JD123 蓄势之术</a:t>
-            </a:r>
-          </a:p>
-          <a:p>
-            <a:r>
-              <a:rPr sz="1600">
+              <a:t>多做练习是掌握算法的关键</a:t>
+            </a:r>
+          </a:p>
+          <a:p>
+            <a:r>
+              <a:rPr sz="1400">
                 <a:solidFill>
                   <a:srgbClr val="000000"/>
                 </a:solidFill>
               </a:rPr>
-              <a:t>JD125 差分之术</a:t>
-            </a:r>
-          </a:p>
-        </p:txBody>
-      </p:sp>
-    </p:spTree>
-  </p:cSld>
-  <p:clrMapOvr>
-    <a:masterClrMapping/>
-  </p:clrMapOvr>
-</p:sld>
-</file>
-
-<file path=ppt/slides/slide8.xml><?xml version="1.0" encoding="utf-8"?>
-<p:sld xmlns:a="http://schemas.openxmlformats.org/drawingml/2006/main" xmlns:p="http://schemas.openxmlformats.org/presentationml/2006/main" xmlns:r="http://schemas.openxmlformats.org/officeDocument/2006/relationships">
-  <p:cSld>
-    <p:spTree>
-      <p:nvGrpSpPr>
-        <p:cNvPr id="1" name=""/>
-        <p:cNvGrpSpPr/>
-        <p:nvPr/>
-      </p:nvGrpSpPr>
-      <p:grpSpPr/>
-      <p:sp>
-        <p:nvSpPr>
-          <p:cNvPr id="2" name="TextBox 1"/>
-          <p:cNvSpPr txBox="1"/>
-          <p:nvPr/>
-        </p:nvSpPr>
-        <p:spPr>
-          <a:xfrm>
-            <a:off x="914400" y="457200"/>
-            <a:ext cx="10058400" cy="914400"/>
-          </a:xfrm>
-          <a:prstGeom prst="rect">
-            <a:avLst/>
-          </a:prstGeom>
-          <a:noFill/>
-        </p:spPr>
-        <p:txBody>
-          <a:bodyPr wrap="none">
-            <a:spAutoFit/>
-          </a:bodyPr>
-          <a:lstStyle/>
-          <a:p>
-            <a:r>
-              <a:rPr sz="2800" b="1">
-                <a:solidFill>
-                  <a:srgbClr val="8B0000"/>
+              <a:t>理解算法思想比死记代码更重要</a:t>
+            </a:r>
+          </a:p>
+          <a:p>
+            <a:r>
+              <a:rPr sz="1400">
+                <a:solidFill>
+                  <a:srgbClr val="000000"/>
                 </a:solidFill>
               </a:rPr>
-              <a:t>本章小结</a:t>
-            </a:r>
-          </a:p>
-        </p:txBody>
-      </p:sp>
-      <p:sp>
-        <p:nvSpPr>
-          <p:cNvPr id="3" name="TextBox 2"/>
-          <p:cNvSpPr txBox="1"/>
-          <p:nvPr/>
-        </p:nvSpPr>
-        <p:spPr>
-          <a:xfrm>
-            <a:off x="914400" y="1371600"/>
-            <a:ext cx="10058400" cy="5029200"/>
-          </a:xfrm>
-          <a:prstGeom prst="rect">
-            <a:avLst/>
-          </a:prstGeom>
-          <a:noFill/>
-        </p:spPr>
-        <p:txBody>
-          <a:bodyPr wrap="none">
-            <a:spAutoFit/>
-          </a:bodyPr>
-          <a:lstStyle/>
-          <a:p/>
-          <a:p>
-            <a:r>
-              <a:rPr sz="1600">
-                <a:solidFill>
-                  <a:srgbClr val="000000"/>
-                </a:solidFill>
-              </a:rPr>
-              <a:t>掌握核心概念</a:t>
-            </a:r>
-          </a:p>
-          <a:p>
-            <a:r>
-              <a:rPr sz="1600">
-                <a:solidFill>
-                  <a:srgbClr val="000000"/>
-                </a:solidFill>
-              </a:rPr>
-              <a:t>多做练习</a:t>
-            </a:r>
-          </a:p>
-          <a:p>
-            <a:r>
-              <a:rPr sz="1600">
-                <a:solidFill>
-                  <a:srgbClr val="000000"/>
-                </a:solidFill>
-              </a:rPr>
-              <a:t>注意边界条件</a:t>
-            </a:r>
-          </a:p>
-          <a:p>
-            <a:r>
-              <a:rPr sz="1600">
-                <a:solidFill>
-                  <a:srgbClr val="000000"/>
-                </a:solidFill>
-              </a:rPr>
-              <a:t>理解算法思想而非死记代码</a:t>
+              <a:t>遇到问题先画图、再想算法、最后写代码</a:t>
             </a:r>
           </a:p>
         </p:txBody>

--- a/textbook/ppt/chapter11_ppt.pptx
+++ b/textbook/ppt/chapter11_ppt.pptx
@@ -12,6 +12,7 @@
     <p:sldId id="260" r:id="rId11"/>
     <p:sldId id="261" r:id="rId12"/>
     <p:sldId id="262" r:id="rId13"/>
+    <p:sldId id="263" r:id="rId14"/>
   </p:sldIdLst>
   <p:sldSz cx="12188952" cy="6858000" type="screen4x3"/>
   <p:notesSz cx="6858000" cy="9144000"/>
@@ -3627,7 +3628,7 @@
                   <a:srgbClr val="000000"/>
                 </a:solidFill>
               </a:rPr>
-              <a:t>JD121 离散聚力 - 离散化+前缀和 (Hard)</a:t>
+              <a:t>JD121 蓄势之术 - 离散化+前缀和 (Hard)</a:t>
             </a:r>
           </a:p>
           <a:p>
@@ -3637,7 +3638,7 @@
                   <a:srgbClr val="000000"/>
                 </a:solidFill>
               </a:rPr>
-              <a:t>JD123 蓄势之术 - 一维前缀和 (Medium)</a:t>
+              <a:t>JD123 差分之术 - 一维前缀和 (Medium)</a:t>
             </a:r>
           </a:p>
           <a:p>
@@ -3647,7 +3648,7 @@
                   <a:srgbClr val="000000"/>
                 </a:solidFill>
               </a:rPr>
-              <a:t>JD125 差分之术 - 一维差分 (Medium)</a:t>
+              <a:t>JD125 离散聚力 - 一维差分 (Medium)</a:t>
             </a:r>
           </a:p>
         </p:txBody>
@@ -3763,6 +3764,91 @@
                 </a:solidFill>
               </a:rPr>
               <a:t>遇到问题先画图、再想算法、最后写代码</a:t>
+            </a:r>
+          </a:p>
+        </p:txBody>
+      </p:sp>
+    </p:spTree>
+  </p:cSld>
+  <p:clrMapOvr>
+    <a:masterClrMapping/>
+  </p:clrMapOvr>
+</p:sld>
+</file>
+
+<file path=ppt/slides/slide8.xml><?xml version="1.0" encoding="utf-8"?>
+<p:sld xmlns:a="http://schemas.openxmlformats.org/drawingml/2006/main" xmlns:p="http://schemas.openxmlformats.org/presentationml/2006/main" xmlns:r="http://schemas.openxmlformats.org/officeDocument/2006/relationships">
+  <p:cSld>
+    <p:spTree>
+      <p:nvGrpSpPr>
+        <p:cNvPr id="1" name=""/>
+        <p:cNvGrpSpPr/>
+        <p:nvPr/>
+      </p:nvGrpSpPr>
+      <p:grpSpPr/>
+      <p:sp>
+        <p:nvSpPr>
+          <p:cNvPr id="2" name="TextBox 1"/>
+          <p:cNvSpPr txBox="1"/>
+          <p:nvPr/>
+        </p:nvSpPr>
+        <p:spPr>
+          <a:xfrm>
+            <a:off x="457200" y="274320"/>
+            <a:ext cx="10972800" cy="731520"/>
+          </a:xfrm>
+          <a:prstGeom prst="rect">
+            <a:avLst/>
+          </a:prstGeom>
+          <a:noFill/>
+        </p:spPr>
+        <p:txBody>
+          <a:bodyPr wrap="none">
+            <a:spAutoFit/>
+          </a:bodyPr>
+          <a:lstStyle/>
+          <a:p>
+            <a:r>
+              <a:rPr sz="2400" b="1">
+                <a:solidFill>
+                  <a:srgbClr val="8B0000"/>
+                </a:solidFill>
+              </a:rPr>
+              <a:t>本章概览</a:t>
+            </a:r>
+          </a:p>
+        </p:txBody>
+      </p:sp>
+      <p:sp>
+        <p:nvSpPr>
+          <p:cNvPr id="3" name="TextBox 2"/>
+          <p:cNvSpPr txBox="1"/>
+          <p:nvPr/>
+        </p:nvSpPr>
+        <p:spPr>
+          <a:xfrm>
+            <a:off x="457200" y="1097280"/>
+            <a:ext cx="10972800" cy="5029200"/>
+          </a:xfrm>
+          <a:prstGeom prst="rect">
+            <a:avLst/>
+          </a:prstGeom>
+          <a:noFill/>
+        </p:spPr>
+        <p:txBody>
+          <a:bodyPr wrap="none">
+            <a:spAutoFit/>
+          </a:bodyPr>
+          <a:lstStyle/>
+          <a:p/>
+          <a:p>
+            <a:r>
+              <a:rPr sz="1600">
+                <a:solidFill>
+                  <a:srgbClr val="000000"/>
+                </a:solidFill>
+              </a:rPr>
+              <a:t>本章学习前缀和、差分和双指针——高效处理区间查询和数组遍历。</a:t>
             </a:r>
           </a:p>
         </p:txBody>

--- a/textbook/ppt/chapter11_ppt.pptx
+++ b/textbook/ppt/chapter11_ppt.pptx
@@ -13,6 +13,7 @@
     <p:sldId id="261" r:id="rId12"/>
     <p:sldId id="262" r:id="rId13"/>
     <p:sldId id="263" r:id="rId14"/>
+    <p:sldId id="264" r:id="rId15"/>
   </p:sldIdLst>
   <p:sldSz cx="12188952" cy="6858000" type="screen4x3"/>
   <p:notesSz cx="6858000" cy="9144000"/>
@@ -3733,7 +3734,7 @@
                   <a:srgbClr val="000000"/>
                 </a:solidFill>
               </a:rPr>
-              <a:t>本章学习了第11章的核心概念</a:t>
+              <a:t/>
             </a:r>
           </a:p>
           <a:p>
@@ -3743,7 +3744,7 @@
                   <a:srgbClr val="000000"/>
                 </a:solidFill>
               </a:rPr>
-              <a:t>多做练习是掌握算法的关键</a:t>
+              <a:t/>
             </a:r>
           </a:p>
           <a:p>
@@ -3753,7 +3754,7 @@
                   <a:srgbClr val="000000"/>
                 </a:solidFill>
               </a:rPr>
-              <a:t>理解算法思想比死记代码更重要</a:t>
+              <a:t/>
             </a:r>
           </a:p>
           <a:p>
@@ -3763,7 +3764,7 @@
                   <a:srgbClr val="000000"/>
                 </a:solidFill>
               </a:rPr>
-              <a:t>遇到问题先画图、再想算法、最后写代码</a:t>
+              <a:t/>
             </a:r>
           </a:p>
         </p:txBody>
@@ -3849,6 +3850,121 @@
                 </a:solidFill>
               </a:rPr>
               <a:t>本章学习前缀和、差分和双指针——高效处理区间查询和数组遍历。</a:t>
+            </a:r>
+          </a:p>
+        </p:txBody>
+      </p:sp>
+    </p:spTree>
+  </p:cSld>
+  <p:clrMapOvr>
+    <a:masterClrMapping/>
+  </p:clrMapOvr>
+</p:sld>
+</file>
+
+<file path=ppt/slides/slide9.xml><?xml version="1.0" encoding="utf-8"?>
+<p:sld xmlns:a="http://schemas.openxmlformats.org/drawingml/2006/main" xmlns:p="http://schemas.openxmlformats.org/presentationml/2006/main" xmlns:r="http://schemas.openxmlformats.org/officeDocument/2006/relationships">
+  <p:cSld>
+    <p:spTree>
+      <p:nvGrpSpPr>
+        <p:cNvPr id="1" name=""/>
+        <p:cNvGrpSpPr/>
+        <p:nvPr/>
+      </p:nvGrpSpPr>
+      <p:grpSpPr/>
+      <p:sp>
+        <p:nvSpPr>
+          <p:cNvPr id="2" name="TextBox 1"/>
+          <p:cNvSpPr txBox="1"/>
+          <p:nvPr/>
+        </p:nvSpPr>
+        <p:spPr>
+          <a:xfrm>
+            <a:off x="457200" y="274320"/>
+            <a:ext cx="10972800" cy="731520"/>
+          </a:xfrm>
+          <a:prstGeom prst="rect">
+            <a:avLst/>
+          </a:prstGeom>
+          <a:noFill/>
+        </p:spPr>
+        <p:txBody>
+          <a:bodyPr wrap="none">
+            <a:spAutoFit/>
+          </a:bodyPr>
+          <a:lstStyle/>
+          <a:p>
+            <a:r>
+              <a:rPr sz="2400" b="1">
+                <a:solidFill>
+                  <a:srgbClr val="8B0000"/>
+                </a:solidFill>
+              </a:rPr>
+              <a:t>第11章 核心要点</a:t>
+            </a:r>
+          </a:p>
+        </p:txBody>
+      </p:sp>
+      <p:sp>
+        <p:nvSpPr>
+          <p:cNvPr id="3" name="TextBox 2"/>
+          <p:cNvSpPr txBox="1"/>
+          <p:nvPr/>
+        </p:nvSpPr>
+        <p:spPr>
+          <a:xfrm>
+            <a:off x="457200" y="1097280"/>
+            <a:ext cx="10972800" cy="5029200"/>
+          </a:xfrm>
+          <a:prstGeom prst="rect">
+            <a:avLst/>
+          </a:prstGeom>
+          <a:noFill/>
+        </p:spPr>
+        <p:txBody>
+          <a:bodyPr wrap="none">
+            <a:spAutoFit/>
+          </a:bodyPr>
+          <a:lstStyle/>
+          <a:p/>
+          <a:p>
+            <a:r>
+              <a:rPr sz="1600">
+                <a:solidFill>
+                  <a:srgbClr val="000000"/>
+                </a:solidFill>
+              </a:rPr>
+              <a:t>• 前缀和：区间求和 O(1)</a:t>
+            </a:r>
+          </a:p>
+          <a:p>
+            <a:r>
+              <a:rPr sz="1600">
+                <a:solidFill>
+                  <a:srgbClr val="000000"/>
+                </a:solidFill>
+              </a:rPr>
+              <a:t>• 差分：区间修改 O(1)</a:t>
+            </a:r>
+          </a:p>
+          <a:p>
+            <a:r>
+              <a:rPr sz="1600">
+                <a:solidFill>
+                  <a:srgbClr val="000000"/>
+                </a:solidFill>
+              </a:rPr>
+              <a:t>• 二维前缀和的容斥原理</a:t>
+            </a:r>
+          </a:p>
+          <a:p>
+            <a:r>
+              <a:rPr sz="1600">
+                <a:solidFill>
+                  <a:srgbClr val="000000"/>
+                </a:solidFill>
+              </a:rPr>
+              <a:t>• 离散化压缩坐标范围</a:t>
             </a:r>
           </a:p>
         </p:txBody>
